--- a/video-meeting/templates/presentation/executive/slides.pptx
+++ b/video-meeting/templates/presentation/executive/slides.pptx
@@ -144,9 +144,9 @@
             <a:pPr>
               <a:defRPr sz="3200">
                 <a:solidFill>
-                  <a:srgbClr val="1F3864"/>
+                  <a:srgbClr val="1A2238"/>
                 </a:solidFill>
-                <a:latin typeface="Georgia"/>
+                <a:latin typeface="Cambria"/>
               </a:defRPr>
             </a:pPr>
             <a:r>
@@ -389,9 +389,9 @@
             <a:pPr>
               <a:defRPr sz="3200">
                 <a:solidFill>
-                  <a:srgbClr val="1F3864"/>
+                  <a:srgbClr val="1A2238"/>
                 </a:solidFill>
-                <a:latin typeface="Georgia"/>
+                <a:latin typeface="Cambria"/>
               </a:defRPr>
             </a:pPr>
             <a:r>
@@ -572,9 +572,9 @@
             <a:pPr>
               <a:defRPr sz="3200">
                 <a:solidFill>
-                  <a:srgbClr val="1F3864"/>
+                  <a:srgbClr val="1A2238"/>
                 </a:solidFill>
-                <a:latin typeface="Georgia"/>
+                <a:latin typeface="Cambria"/>
               </a:defRPr>
             </a:pPr>
             <a:r>
@@ -755,9 +755,9 @@
             <a:pPr>
               <a:defRPr sz="3200">
                 <a:solidFill>
-                  <a:srgbClr val="1F3864"/>
+                  <a:srgbClr val="1A2238"/>
                 </a:solidFill>
-                <a:latin typeface="Georgia"/>
+                <a:latin typeface="Cambria"/>
               </a:defRPr>
             </a:pPr>
             <a:r>
@@ -942,9 +942,9 @@
             <a:pPr>
               <a:defRPr sz="3200">
                 <a:solidFill>
-                  <a:srgbClr val="1F3864"/>
+                  <a:srgbClr val="1A2238"/>
                 </a:solidFill>
-                <a:latin typeface="Georgia"/>
+                <a:latin typeface="Cambria"/>
               </a:defRPr>
             </a:pPr>
             <a:r>
@@ -1187,9 +1187,9 @@
             <a:pPr>
               <a:defRPr sz="3200">
                 <a:solidFill>
-                  <a:srgbClr val="1F3864"/>
+                  <a:srgbClr val="1A2238"/>
                 </a:solidFill>
-                <a:latin typeface="Georgia"/>
+                <a:latin typeface="Cambria"/>
               </a:defRPr>
             </a:pPr>
             <a:r>
@@ -1487,9 +1487,9 @@
             <a:pPr>
               <a:defRPr sz="3200">
                 <a:solidFill>
-                  <a:srgbClr val="1F3864"/>
+                  <a:srgbClr val="1A2238"/>
                 </a:solidFill>
-                <a:latin typeface="Georgia"/>
+                <a:latin typeface="Cambria"/>
               </a:defRPr>
             </a:pPr>
             <a:r>
@@ -1913,9 +1913,9 @@
             <a:pPr>
               <a:defRPr sz="3200">
                 <a:solidFill>
-                  <a:srgbClr val="1F3864"/>
+                  <a:srgbClr val="1A2238"/>
                 </a:solidFill>
-                <a:latin typeface="Georgia"/>
+                <a:latin typeface="Cambria"/>
               </a:defRPr>
             </a:pPr>
             <a:r>
@@ -2143,9 +2143,9 @@
             <a:pPr>
               <a:defRPr sz="3200">
                 <a:solidFill>
-                  <a:srgbClr val="1F3864"/>
+                  <a:srgbClr val="1A2238"/>
                 </a:solidFill>
-                <a:latin typeface="Georgia"/>
+                <a:latin typeface="Cambria"/>
               </a:defRPr>
             </a:pPr>
             <a:r>
@@ -2428,9 +2428,9 @@
             <a:pPr>
               <a:defRPr sz="3200">
                 <a:solidFill>
-                  <a:srgbClr val="1F3864"/>
+                  <a:srgbClr val="1A2238"/>
                 </a:solidFill>
-                <a:latin typeface="Georgia"/>
+                <a:latin typeface="Cambria"/>
               </a:defRPr>
             </a:pPr>
             <a:r>
